--- a/docs/content/introduction/introduction_lecture.pptx
+++ b/docs/content/introduction/introduction_lecture.pptx
@@ -22,6 +22,8 @@
     <p:sldId id="270" r:id="rId16"/>
     <p:sldId id="271" r:id="rId17"/>
     <p:sldId id="272" r:id="rId18"/>
+    <p:sldId id="273" r:id="rId19"/>
+    <p:sldId id="274" r:id="rId20"/>
   </p:sldIdLst>
   <p:sldSz cx="9144000" cy="5143500" type="screen16x9"/>
   <p:notesSz cx="6858000" cy="9144000"/>
@@ -3356,7 +3358,7 @@
             </a:pPr>
             <a:r>
               <a:rPr/>
-              <a:t>2026-07-05</a:t>
+              <a:t>2026-08-27</a:t>
             </a:r>
           </a:p>
         </p:txBody>
@@ -3439,14 +3441,7 @@
             </a:r>
             <a:r>
               <a:rPr/>
-              <a:t> to do this?</a:t>
-            </a:r>
-          </a:p>
-          <a:p>
-            <a:pPr lvl="1"/>
-            <a:r>
-              <a:rPr/>
-              <a:t>YES? or no NO?</a:t>
+              <a:t> to do this? — Yes or no?</a:t>
             </a:r>
           </a:p>
           <a:p>
@@ -3524,6 +3519,33 @@
             <a:r>
               <a:rPr sz="2000"/>
               <a:t>These two principles are the foundation of all experimental design. One tree is a sample size of one — we cannot generalize from that.</a:t>
+            </a:r>
+          </a:p>
+          <a:p>
+            <a:pPr lvl="0" indent="0" marL="1270000">
+              <a:buNone/>
+            </a:pPr>
+            <a:r>
+              <a:rPr sz="2000" b="1"/>
+              <a:t>Note</a:t>
+            </a:r>
+          </a:p>
+          <a:p>
+            <a:pPr lvl="0" indent="0" marL="1270000">
+              <a:buNone/>
+            </a:pPr>
+            <a:r>
+              <a:rPr sz="2000" b="1"/>
+              <a:t>📚 Suggested reading (outside of class)</a:t>
+            </a:r>
+          </a:p>
+          <a:p>
+            <a:pPr lvl="0" indent="0" marL="1270000">
+              <a:buNone/>
+            </a:pPr>
+            <a:r>
+              <a:rPr sz="2000"/>
+              <a:t>Whitlock &amp; Schluter, Ch. 1, section on samples and populations — why we sample instead of measuring every leaf on every tree, and what makes a sample representative.</a:t>
             </a:r>
           </a:p>
         </p:txBody>
@@ -3635,9 +3657,12 @@
               <a:rPr b="1"/>
               <a:t>Dependent variable (response):</a:t>
             </a:r>
-            <a:r>
-              <a:rPr/>
-              <a:t> - The thing we measure — it </a:t>
+          </a:p>
+          <a:p>
+            <a:pPr lvl="0"/>
+            <a:r>
+              <a:rPr/>
+              <a:t>The thing we measure — it </a:t>
             </a:r>
             <a:r>
               <a:rPr i="1"/>
@@ -3645,7 +3670,14 @@
             </a:r>
             <a:r>
               <a:rPr/>
-              <a:t> our treatment - Example: leaf mass, leaf area</a:t>
+              <a:t> our treatment</a:t>
+            </a:r>
+          </a:p>
+          <a:p>
+            <a:pPr lvl="0"/>
+            <a:r>
+              <a:rPr/>
+              <a:t>Example: leaf mass, leaf area</a:t>
             </a:r>
           </a:p>
           <a:p>
@@ -3656,9 +3688,19 @@
               <a:rPr b="1"/>
               <a:t>Independent variable (explanatory):</a:t>
             </a:r>
-            <a:r>
-              <a:rPr/>
-              <a:t> - The thing we control or group by - Example: side of tree (sunny vs. shady)</a:t>
+          </a:p>
+          <a:p>
+            <a:pPr lvl="0"/>
+            <a:r>
+              <a:rPr/>
+              <a:t>The thing we control or group by</a:t>
+            </a:r>
+          </a:p>
+          <a:p>
+            <a:pPr lvl="0"/>
+            <a:r>
+              <a:rPr/>
+              <a:t>Example: side of tree (sunny vs. shady)</a:t>
             </a:r>
           </a:p>
         </p:txBody>
@@ -3773,7 +3815,7 @@
             </a:pPr>
             <a:r>
               <a:rPr/>
-              <a:t>Each group needs to collect at least 2 pairs of leaves</a:t>
+              <a:t>→ ACTIVITY 1 starts now</a:t>
             </a:r>
           </a:p>
         </p:txBody>
@@ -3793,109 +3835,38 @@
           <a:bodyPr/>
           <a:lstStyle/>
           <a:p>
-            <a:pPr lvl="0"/>
-            <a:r>
-              <a:rPr/>
-              <a:t>Collect </a:t>
-            </a:r>
+            <a:pPr lvl="0" indent="0" marL="0">
+              <a:buNone/>
+            </a:pPr>
             <a:r>
               <a:rPr b="1"/>
-              <a:t>1 mature leaf from the sunny side</a:t>
-            </a:r>
-            <a:r>
-              <a:rPr/>
-              <a:t> and </a:t>
+              <a:t>🛑 Go to Activity 1 — “Measuring Leaves and Entering Data”</a:t>
+            </a:r>
+          </a:p>
+          <a:p>
+            <a:pPr lvl="0" indent="0" marL="0">
+              <a:buNone/>
+            </a:pPr>
+            <a:r>
+              <a:rPr/>
+              <a:t>Close the slides. Open the </a:t>
             </a:r>
             <a:r>
               <a:rPr b="1"/>
-              <a:t>1 from the shady side</a:t>
-            </a:r>
-            <a:r>
-              <a:rPr/>
-              <a:t> of the same tree</a:t>
-            </a:r>
-          </a:p>
-          <a:p>
-            <a:pPr lvl="0"/>
-            <a:r>
-              <a:rPr/>
-              <a:t>Do this on </a:t>
-            </a:r>
-            <a:r>
-              <a:rPr b="1"/>
-              <a:t>at least 2 separate trees</a:t>
-            </a:r>
-            <a:r>
-              <a:rPr/>
-              <a:t> (we share trees since we are limited)</a:t>
-            </a:r>
-          </a:p>
-          <a:p>
-            <a:pPr lvl="0"/>
-            <a:r>
-              <a:rPr/>
-              <a:t>Standardize your collection: </a:t>
-            </a:r>
-            <a:r>
-              <a:rPr b="1"/>
-              <a:t>(DISCUSS AND FIGURE IT OUT BY YOURSELVES)</a:t>
-            </a:r>
-          </a:p>
-          <a:p>
-            <a:pPr lvl="1"/>
-            <a:r>
-              <a:rPr/>
-              <a:t>How high do we collect from?</a:t>
-            </a:r>
-          </a:p>
-          <a:p>
-            <a:pPr lvl="1"/>
-            <a:r>
-              <a:rPr/>
-              <a:t>What does “mature” mean?</a:t>
-            </a:r>
-          </a:p>
-          <a:p>
-            <a:pPr lvl="1"/>
-            <a:r>
-              <a:rPr/>
-              <a:t>Any other decisions to standardize?</a:t>
-            </a:r>
-          </a:p>
-          <a:p>
-            <a:pPr lvl="0" indent="0" marL="1270000">
-              <a:buNone/>
-            </a:pPr>
-            <a:r>
-              <a:rPr sz="2000" b="1"/>
-              <a:t>Important</a:t>
-            </a:r>
-          </a:p>
-          <a:p>
-            <a:pPr lvl="0" indent="0" marL="1270000">
-              <a:buNone/>
-            </a:pPr>
-            <a:r>
-              <a:rPr sz="2000" b="1"/>
-              <a:t>⚠️ Watch out!</a:t>
-            </a:r>
-          </a:p>
-          <a:p>
-            <a:pPr lvl="0" indent="0" marL="1270000">
-              <a:buNone/>
-            </a:pPr>
-            <a:r>
-              <a:rPr sz="2000"/>
-              <a:t>If everyone collects differently (different heights, different leaf ages), we cannot combine our data.</a:t>
-            </a:r>
-          </a:p>
-          <a:p>
-            <a:pPr lvl="0" indent="0" marL="1270000">
-              <a:buNone/>
-            </a:pPr>
-            <a:r>
-              <a:rPr sz="2000" b="1"/>
-              <a:t>Agree on the rules or methods before collecting…..</a:t>
+              <a:t>Activity 1</a:t>
+            </a:r>
+            <a:r>
+              <a:rPr/>
+              <a:t> worksheet, form your field group, and head outside to the pine stand.</a:t>
+            </a:r>
+          </a:p>
+          <a:p>
+            <a:pPr lvl="0" indent="0" marL="0">
+              <a:buNone/>
+            </a:pPr>
+            <a:r>
+              <a:rPr/>
+              <a:t>The worksheet walks you through everything from here: collecting leaves, deciding what to measure, building your spreadsheet, and sketching a first graph. Come back to these slides only if you want to re-check a definition.</a:t>
             </a:r>
           </a:p>
         </p:txBody>
@@ -3935,11 +3906,8 @@
         <p:spPr>
           <a:xfrm>
             <a:off x="0" y="0"/>
-            <a:ext cx="9144000" cy="602780"/>
+            <a:ext cx="9144000" cy="582780"/>
           </a:xfrm>
-          <a:solidFill>
-            <a:srgbClr val="1A1A2E"/>
-          </a:solidFill>
         </p:spPr>
         <p:txBody>
           <a:bodyPr/>
@@ -3950,7 +3918,7 @@
             </a:pPr>
             <a:r>
               <a:rPr/>
-              <a:t>Back in the lab · Before we begin</a:t>
+              <a:t>Each group collects 3 sunny + 3 shady leaves per tree</a:t>
             </a:r>
           </a:p>
         </p:txBody>
@@ -3962,7 +3930,7 @@
             <a:spLocks noGrp="1"/>
           </p:cNvSpPr>
           <p:nvPr>
-            <p:ph idx="1" sz="half"/>
+            <p:ph idx="1"/>
           </p:nvPr>
         </p:nvSpPr>
         <p:spPr/>
@@ -3972,96 +3940,95 @@
           <a:p>
             <a:pPr lvl="0"/>
             <a:r>
+              <a:rPr/>
+              <a:t>Collect </a:t>
+            </a:r>
+            <a:r>
               <a:rPr b="1"/>
-              <a:t>What can we measure?</a:t>
+              <a:t>3 mature leaves from the sunny side</a:t>
+            </a:r>
+            <a:r>
+              <a:rPr/>
+              <a:t> and </a:t>
+            </a:r>
+            <a:r>
+              <a:rPr b="1"/>
+              <a:t>3 from the shady side</a:t>
+            </a:r>
+            <a:r>
+              <a:rPr/>
+              <a:t> of the same tree</a:t>
+            </a:r>
+          </a:p>
+          <a:p>
+            <a:pPr lvl="0"/>
+            <a:r>
+              <a:rPr/>
+              <a:t>Do this on </a:t>
+            </a:r>
+            <a:r>
+              <a:rPr b="1"/>
+              <a:t>at least 1 tree per group</a:t>
+            </a:r>
+            <a:r>
+              <a:rPr/>
+              <a:t> (more trees if time allows — we share trees since we are limited)</a:t>
+            </a:r>
+          </a:p>
+          <a:p>
+            <a:pPr lvl="0"/>
+            <a:r>
+              <a:rPr/>
+              <a:t>Standardize your collection: </a:t>
+            </a:r>
+            <a:r>
+              <a:rPr b="1"/>
+              <a:t>(DISCUSS AND FIGURE IT OUT BY YOURSELVES)</a:t>
             </a:r>
           </a:p>
           <a:p>
             <a:pPr lvl="1"/>
             <a:r>
               <a:rPr/>
-              <a:t>mass (grams)</a:t>
+              <a:t>How high do we collect from?</a:t>
             </a:r>
           </a:p>
           <a:p>
             <a:pPr lvl="1"/>
             <a:r>
               <a:rPr/>
-              <a:t>length (mm or cm)</a:t>
+              <a:t>What does “mature” mean?</a:t>
             </a:r>
           </a:p>
           <a:p>
             <a:pPr lvl="1"/>
             <a:r>
               <a:rPr/>
-              <a:t>width (mm or cm)</a:t>
+              <a:t>What will we measure with — </a:t>
+            </a:r>
+            <a:r>
+              <a:rPr b="1"/>
+              <a:t>calipers or a ruler</a:t>
+            </a:r>
+            <a:r>
+              <a:rPr/>
+              <a:t>?</a:t>
             </a:r>
           </a:p>
           <a:p>
             <a:pPr lvl="1"/>
             <a:r>
               <a:rPr/>
-              <a:t>surface area (cm²) — how?</a:t>
-            </a:r>
-          </a:p>
-          <a:p>
-            <a:pPr lvl="1"/>
-            <a:r>
-              <a:rPr/>
-              <a:t>others?</a:t>
-            </a:r>
-          </a:p>
-          <a:p>
-            <a:pPr lvl="0"/>
-            <a:r>
-              <a:rPr b="1"/>
-              <a:t>Decisions to make as a group:</a:t>
-            </a:r>
-          </a:p>
-          <a:p>
-            <a:pPr lvl="1"/>
-            <a:r>
-              <a:rPr/>
-              <a:t>What units?</a:t>
-            </a:r>
-          </a:p>
-          <a:p>
-            <a:pPr lvl="1"/>
-            <a:r>
-              <a:rPr/>
-              <a:t>What abbreviations or vocabulary for the variables?</a:t>
-            </a:r>
-          </a:p>
-          <a:p>
-            <a:pPr lvl="1"/>
-            <a:r>
-              <a:rPr/>
-              <a:t>What if a leaf is damaged?</a:t>
-            </a:r>
-          </a:p>
-        </p:txBody>
-      </p:sp>
-      <p:sp>
-        <p:nvSpPr>
-          <p:cNvPr id="4" name="Content Placeholder 3"/>
-          <p:cNvSpPr>
-            <a:spLocks noGrp="1"/>
-          </p:cNvSpPr>
-          <p:nvPr>
-            <p:ph idx="2" sz="half"/>
-          </p:nvPr>
-        </p:nvSpPr>
-        <p:spPr/>
-        <p:txBody>
-          <a:bodyPr/>
-          <a:lstStyle/>
+              <a:t>Any other decisions to standardize?</a:t>
+            </a:r>
+          </a:p>
           <a:p>
             <a:pPr lvl="0" indent="0" marL="1270000">
               <a:buNone/>
             </a:pPr>
             <a:r>
               <a:rPr sz="2000" b="1"/>
-              <a:t>Note</a:t>
+              <a:t>Important</a:t>
             </a:r>
           </a:p>
           <a:p>
@@ -4070,40 +4037,25 @@
             </a:pPr>
             <a:r>
               <a:rPr sz="2000" b="1"/>
-              <a:t>📖 New vocabulary</a:t>
-            </a:r>
-          </a:p>
-          <a:p>
-            <a:pPr lvl="0"/>
+              <a:t>⚠️ Watch out!</a:t>
+            </a:r>
+          </a:p>
+          <a:p>
+            <a:pPr lvl="0" indent="0" marL="1270000">
+              <a:buNone/>
+            </a:pPr>
+            <a:r>
+              <a:rPr sz="2000"/>
+              <a:t>If everyone collects differently (different heights, different leaf ages), we cannot combine our data.</a:t>
+            </a:r>
+          </a:p>
+          <a:p>
+            <a:pPr lvl="0" indent="0" marL="1270000">
+              <a:buNone/>
+            </a:pPr>
             <a:r>
               <a:rPr sz="2000" b="1"/>
-              <a:t>Metadata</a:t>
-            </a:r>
-            <a:r>
-              <a:rPr sz="2000"/>
-              <a:t> = data </a:t>
-            </a:r>
-            <a:r>
-              <a:rPr sz="2000" i="1"/>
-              <a:t>about</a:t>
-            </a:r>
-            <a:r>
-              <a:rPr sz="2000"/>
-              <a:t> your data.</a:t>
-            </a:r>
-          </a:p>
-          <a:p>
-            <a:pPr lvl="0"/>
-            <a:r>
-              <a:rPr sz="2000"/>
-              <a:t>Who collected it? When? Where? With what instrument? Under what conditions?</a:t>
-            </a:r>
-          </a:p>
-          <a:p>
-            <a:pPr lvl="0"/>
-            <a:r>
-              <a:rPr sz="2000"/>
-              <a:t>Without metadata, data are nearly useless to anyone else — including future you.</a:t>
+              <a:t>Agree on the rules or methods before collecting…..</a:t>
             </a:r>
           </a:p>
         </p:txBody>
@@ -4143,8 +4095,11 @@
         <p:spPr>
           <a:xfrm>
             <a:off x="0" y="0"/>
-            <a:ext cx="9144000" cy="582780"/>
+            <a:ext cx="9144000" cy="602780"/>
           </a:xfrm>
+          <a:solidFill>
+            <a:srgbClr val="1A1A2E"/>
+          </a:solidFill>
         </p:spPr>
         <p:txBody>
           <a:bodyPr/>
@@ -4155,7 +4110,7 @@
             </a:pPr>
             <a:r>
               <a:rPr/>
-              <a:t>Back in the lab · Setting up the spreadsheet</a:t>
+              <a:t>Back in the lab · Before we begin</a:t>
             </a:r>
           </a:p>
         </p:txBody>
@@ -4167,7 +4122,7 @@
             <a:spLocks noGrp="1"/>
           </p:cNvSpPr>
           <p:nvPr>
-            <p:ph idx="1"/>
+            <p:ph idx="1" sz="half"/>
           </p:nvPr>
         </p:nvSpPr>
         <p:spPr/>
@@ -4177,94 +4132,96 @@
           <a:p>
             <a:pPr lvl="0"/>
             <a:r>
-              <a:rPr/>
-              <a:t>How do you enter this into the Excel sheet?</a:t>
+              <a:rPr b="1"/>
+              <a:t>What can we measure?</a:t>
             </a:r>
           </a:p>
           <a:p>
             <a:pPr lvl="1"/>
             <a:r>
               <a:rPr/>
-              <a:t>What does the sheet look like? Mock something up</a:t>
-            </a:r>
-          </a:p>
-          <a:p>
-            <a:pPr lvl="0"/>
-            <a:r>
-              <a:rPr/>
-              <a:t>What are the </a:t>
-            </a:r>
+              <a:t>mass (grams)</a:t>
+            </a:r>
+          </a:p>
+          <a:p>
+            <a:pPr lvl="1"/>
+            <a:r>
+              <a:rPr/>
+              <a:t>length (mm or cm)</a:t>
+            </a:r>
+          </a:p>
+          <a:p>
+            <a:pPr lvl="1"/>
+            <a:r>
+              <a:rPr/>
+              <a:t>width (mm or cm)</a:t>
+            </a:r>
+          </a:p>
+          <a:p>
+            <a:pPr lvl="1"/>
+            <a:r>
+              <a:rPr/>
+              <a:t>surface area (cm²) — how?</a:t>
+            </a:r>
+          </a:p>
+          <a:p>
+            <a:pPr lvl="1"/>
+            <a:r>
+              <a:rPr/>
+              <a:t>others?</a:t>
+            </a:r>
+          </a:p>
+          <a:p>
+            <a:pPr lvl="0"/>
             <a:r>
               <a:rPr b="1"/>
-              <a:t>column names</a:t>
-            </a:r>
-            <a:r>
-              <a:rPr/>
-              <a:t> you will use?</a:t>
-            </a:r>
-          </a:p>
-          <a:p>
-            <a:pPr lvl="0"/>
-            <a:r>
-              <a:rPr/>
-              <a:t>What are the </a:t>
-            </a:r>
-            <a:r>
-              <a:rPr b="1"/>
-              <a:t>units</a:t>
-            </a:r>
-            <a:r>
-              <a:rPr/>
-              <a:t> for each column?</a:t>
-            </a:r>
-          </a:p>
-          <a:p>
-            <a:pPr lvl="0"/>
-            <a:r>
-              <a:rPr/>
-              <a:t>What is the </a:t>
-            </a:r>
-            <a:r>
-              <a:rPr b="1"/>
-              <a:t>vocabulary</a:t>
-            </a:r>
-            <a:r>
-              <a:rPr/>
-              <a:t>? (no spaces in column names, use </a:t>
-            </a:r>
-            <a:r>
-              <a:rPr>
-                <a:latin typeface="Courier"/>
-              </a:rPr>
-              <a:t>_</a:t>
-            </a:r>
-            <a:r>
-              <a:rPr/>
-              <a:t> instead)</a:t>
-            </a:r>
-          </a:p>
-          <a:p>
-            <a:pPr lvl="0"/>
-            <a:r>
-              <a:rPr/>
-              <a:t>Where does the </a:t>
-            </a:r>
-            <a:r>
-              <a:rPr b="1"/>
-              <a:t>metadata</a:t>
-            </a:r>
-            <a:r>
-              <a:rPr/>
-              <a:t> go?</a:t>
-            </a:r>
-          </a:p>
+              <a:t>Decisions to make as a group:</a:t>
+            </a:r>
+          </a:p>
+          <a:p>
+            <a:pPr lvl="1"/>
+            <a:r>
+              <a:rPr/>
+              <a:t>What units?</a:t>
+            </a:r>
+          </a:p>
+          <a:p>
+            <a:pPr lvl="1"/>
+            <a:r>
+              <a:rPr/>
+              <a:t>What abbreviations or vocabulary for the variables?</a:t>
+            </a:r>
+          </a:p>
+          <a:p>
+            <a:pPr lvl="1"/>
+            <a:r>
+              <a:rPr/>
+              <a:t>What if a leaf is damaged?</a:t>
+            </a:r>
+          </a:p>
+        </p:txBody>
+      </p:sp>
+      <p:sp>
+        <p:nvSpPr>
+          <p:cNvPr id="4" name="Content Placeholder 3"/>
+          <p:cNvSpPr>
+            <a:spLocks noGrp="1"/>
+          </p:cNvSpPr>
+          <p:nvPr>
+            <p:ph idx="2" sz="half"/>
+          </p:nvPr>
+        </p:nvSpPr>
+        <p:spPr/>
+        <p:txBody>
+          <a:bodyPr/>
+          <a:lstStyle/>
           <a:p>
             <a:pPr lvl="0" indent="0" marL="1270000">
               <a:buNone/>
             </a:pPr>
             <a:r>
               <a:rPr sz="2000" b="1"/>
-              <a:t>Tip</a:t>
+              <a:t>Note</a:t>
             </a:r>
           </a:p>
           <a:p>
@@ -4273,37 +4230,40 @@
             </a:pPr>
             <a:r>
               <a:rPr sz="2000" b="1"/>
-              <a:t>Best practice for column names:</a:t>
-            </a:r>
-          </a:p>
-          <a:p>
-            <a:pPr lvl="0" indent="0" marL="1270000">
-              <a:buNone/>
-            </a:pPr>
-            <a:r>
-              <a:rPr sz="2000">
-                <a:latin typeface="Courier"/>
-              </a:rPr>
-              <a:t>leaf_mass_g</a:t>
+              <a:t>📖 New vocabulary</a:t>
+            </a:r>
+          </a:p>
+          <a:p>
+            <a:pPr lvl="0"/>
+            <a:r>
+              <a:rPr sz="2000" b="1"/>
+              <a:t>Metadata</a:t>
             </a:r>
             <a:r>
               <a:rPr sz="2000"/>
-              <a:t>, not </a:t>
-            </a:r>
-            <a:r>
-              <a:rPr sz="2000">
-                <a:latin typeface="Courier"/>
-              </a:rPr>
-              <a:t>Leaf Mass (g) - why???</a:t>
-            </a:r>
-          </a:p>
-          <a:p>
-            <a:pPr lvl="0" indent="0" marL="1270000">
-              <a:buNone/>
-            </a:pPr>
+              <a:t> = data </a:t>
+            </a:r>
+            <a:r>
+              <a:rPr sz="2000" i="1"/>
+              <a:t>about</a:t>
+            </a:r>
             <a:r>
               <a:rPr sz="2000"/>
-              <a:t>Consistent, no spaces, no special characters, units in the name and all lower case - why?????</a:t>
+              <a:t> your data.</a:t>
+            </a:r>
+          </a:p>
+          <a:p>
+            <a:pPr lvl="0"/>
+            <a:r>
+              <a:rPr sz="2000"/>
+              <a:t>Who collected it? When? Where? With what instrument? Under what conditions?</a:t>
+            </a:r>
+          </a:p>
+          <a:p>
+            <a:pPr lvl="0"/>
+            <a:r>
+              <a:rPr sz="2000"/>
+              <a:t>Without metadata, data are nearly useless to anyone else — including future you.</a:t>
             </a:r>
           </a:p>
         </p:txBody>
@@ -4355,7 +4315,7 @@
             </a:pPr>
             <a:r>
               <a:rPr/>
-              <a:t>Can you make a graph in Excel?</a:t>
+              <a:t>Back in the lab · Setting up the spreadsheet</a:t>
             </a:r>
           </a:p>
         </p:txBody>
@@ -4378,28 +4338,84 @@
             <a:pPr lvl="0"/>
             <a:r>
               <a:rPr/>
-              <a:t>Using what you collected, make a simple Excel chart</a:t>
+              <a:t>How do you enter this into the Excel sheet?</a:t>
             </a:r>
           </a:p>
           <a:p>
             <a:pPr lvl="1"/>
             <a:r>
               <a:rPr/>
-              <a:t>What would the graph look like?</a:t>
-            </a:r>
-          </a:p>
-          <a:p>
-            <a:pPr lvl="1"/>
-            <a:r>
-              <a:rPr/>
-              <a:t>What goes on the X axis? The Y axis?</a:t>
-            </a:r>
-          </a:p>
-          <a:p>
-            <a:pPr lvl="1"/>
-            <a:r>
-              <a:rPr/>
-              <a:t>What can you derive from the data already?</a:t>
+              <a:t>What does the sheet look like? Mock something up</a:t>
+            </a:r>
+          </a:p>
+          <a:p>
+            <a:pPr lvl="0"/>
+            <a:r>
+              <a:rPr/>
+              <a:t>What are the </a:t>
+            </a:r>
+            <a:r>
+              <a:rPr b="1"/>
+              <a:t>column names</a:t>
+            </a:r>
+            <a:r>
+              <a:rPr/>
+              <a:t> you will use?</a:t>
+            </a:r>
+          </a:p>
+          <a:p>
+            <a:pPr lvl="0"/>
+            <a:r>
+              <a:rPr/>
+              <a:t>What are the </a:t>
+            </a:r>
+            <a:r>
+              <a:rPr b="1"/>
+              <a:t>units</a:t>
+            </a:r>
+            <a:r>
+              <a:rPr/>
+              <a:t> for each column?</a:t>
+            </a:r>
+          </a:p>
+          <a:p>
+            <a:pPr lvl="0"/>
+            <a:r>
+              <a:rPr/>
+              <a:t>What is the </a:t>
+            </a:r>
+            <a:r>
+              <a:rPr b="1"/>
+              <a:t>vocabulary</a:t>
+            </a:r>
+            <a:r>
+              <a:rPr/>
+              <a:t>? (no spaces in column names, use </a:t>
+            </a:r>
+            <a:r>
+              <a:rPr>
+                <a:latin typeface="Courier"/>
+              </a:rPr>
+              <a:t>_</a:t>
+            </a:r>
+            <a:r>
+              <a:rPr/>
+              <a:t> instead)</a:t>
+            </a:r>
+          </a:p>
+          <a:p>
+            <a:pPr lvl="0"/>
+            <a:r>
+              <a:rPr/>
+              <a:t>Where does the </a:t>
+            </a:r>
+            <a:r>
+              <a:rPr b="1"/>
+              <a:t>metadata</a:t>
+            </a:r>
+            <a:r>
+              <a:rPr/>
+              <a:t> go?</a:t>
             </a:r>
           </a:p>
           <a:p>
@@ -4408,7 +4424,7 @@
             </a:pPr>
             <a:r>
               <a:rPr sz="2000" b="1"/>
-              <a:t>Note</a:t>
+              <a:t>Tip</a:t>
             </a:r>
           </a:p>
           <a:p>
@@ -4416,8 +4432,38 @@
               <a:buNone/>
             </a:pPr>
             <a:r>
+              <a:rPr sz="2000" b="1"/>
+              <a:t>Best practice for column names:</a:t>
+            </a:r>
+          </a:p>
+          <a:p>
+            <a:pPr lvl="0" indent="0" marL="1270000">
+              <a:buNone/>
+            </a:pPr>
+            <a:r>
+              <a:rPr sz="2000">
+                <a:latin typeface="Courier"/>
+              </a:rPr>
+              <a:t>leaf_mass_g</a:t>
+            </a:r>
+            <a:r>
               <a:rPr sz="2000"/>
-              <a:t>Excel is great for a first look. But as datasets grow larger and analyses more complex, we need another approach - R.</a:t>
+              <a:t>, not </a:t>
+            </a:r>
+            <a:r>
+              <a:rPr sz="2000">
+                <a:latin typeface="Courier"/>
+              </a:rPr>
+              <a:t>Leaf Mass (g) - why???</a:t>
+            </a:r>
+          </a:p>
+          <a:p>
+            <a:pPr lvl="0" indent="0" marL="1270000">
+              <a:buNone/>
+            </a:pPr>
+            <a:r>
+              <a:rPr sz="2000"/>
+              <a:t>Consistent, no spaces, no special characters, units in the name and all lower case - why?????</a:t>
             </a:r>
           </a:p>
         </p:txBody>
@@ -4469,7 +4515,7 @@
             </a:pPr>
             <a:r>
               <a:rPr/>
-              <a:t>What R code looks like · A preview</a:t>
+              <a:t>Can you make a graph in Excel?</a:t>
             </a:r>
           </a:p>
         </p:txBody>
@@ -4489,373 +4535,31 @@
           <a:bodyPr/>
           <a:lstStyle/>
           <a:p>
-            <a:pPr lvl="0" indent="0" marL="0">
-              <a:buNone/>
-            </a:pPr>
-            <a:r>
-              <a:rPr/>
-              <a:t>You do not need to understand this yet — just look at the shape of it.</a:t>
-            </a:r>
-          </a:p>
-          <a:p>
-            <a:pPr lvl="0" indent="0">
-              <a:buNone/>
-            </a:pPr>
-            <a:r>
-              <a:rPr>
-                <a:solidFill>
-                  <a:srgbClr val="5E5E5E"/>
-                </a:solidFill>
-                <a:latin typeface="Courier"/>
-              </a:rPr>
-              <a:t># Load the tools we need</a:t>
-            </a:r>
-            <a:br/>
-            <a:r>
-              <a:rPr>
-                <a:solidFill>
-                  <a:srgbClr val="4758AB"/>
-                </a:solidFill>
-                <a:latin typeface="Courier"/>
-              </a:rPr>
-              <a:t>library</a:t>
-            </a:r>
-            <a:r>
-              <a:rPr>
-                <a:solidFill>
-                  <a:srgbClr val="003B4F"/>
-                </a:solidFill>
-                <a:latin typeface="Courier"/>
-              </a:rPr>
-              <a:t>(tidyverse)</a:t>
-            </a:r>
-            <a:br/>
-            <a:r>
-              <a:rPr>
-                <a:solidFill>
-                  <a:srgbClr val="4758AB"/>
-                </a:solidFill>
-                <a:latin typeface="Courier"/>
-              </a:rPr>
-              <a:t>library</a:t>
-            </a:r>
-            <a:r>
-              <a:rPr>
-                <a:solidFill>
-                  <a:srgbClr val="003B4F"/>
-                </a:solidFill>
-                <a:latin typeface="Courier"/>
-              </a:rPr>
-              <a:t>(readxl)</a:t>
-            </a:r>
-            <a:br/>
-            <a:br/>
-            <a:r>
-              <a:rPr>
-                <a:solidFill>
-                  <a:srgbClr val="5E5E5E"/>
-                </a:solidFill>
-                <a:latin typeface="Courier"/>
-              </a:rPr>
-              <a:t># Read our leaf data into R</a:t>
-            </a:r>
-            <a:br/>
-            <a:r>
-              <a:rPr>
-                <a:solidFill>
-                  <a:srgbClr val="003B4F"/>
-                </a:solidFill>
-                <a:latin typeface="Courier"/>
-              </a:rPr>
-              <a:t>tree_df &lt;- </a:t>
-            </a:r>
-            <a:r>
-              <a:rPr>
-                <a:solidFill>
-                  <a:srgbClr val="4758AB"/>
-                </a:solidFill>
-                <a:latin typeface="Courier"/>
-              </a:rPr>
-              <a:t>read_excel</a:t>
-            </a:r>
-            <a:r>
-              <a:rPr>
-                <a:solidFill>
-                  <a:srgbClr val="003B4F"/>
-                </a:solidFill>
-                <a:latin typeface="Courier"/>
-              </a:rPr>
-              <a:t>(</a:t>
-            </a:r>
-            <a:r>
-              <a:rPr>
-                <a:solidFill>
-                  <a:srgbClr val="20794D"/>
-                </a:solidFill>
-                <a:latin typeface="Courier"/>
-              </a:rPr>
-              <a:t>"data/tree_experiment.xlsx"</a:t>
-            </a:r>
-            <a:r>
-              <a:rPr>
-                <a:solidFill>
-                  <a:srgbClr val="003B4F"/>
-                </a:solidFill>
-                <a:latin typeface="Courier"/>
-              </a:rPr>
-              <a:t>)</a:t>
-            </a:r>
-            <a:br/>
-            <a:br/>
-            <a:r>
-              <a:rPr>
-                <a:solidFill>
-                  <a:srgbClr val="5E5E5E"/>
-                </a:solidFill>
-                <a:latin typeface="Courier"/>
-              </a:rPr>
-              <a:t># Compute the mean weight for each side</a:t>
-            </a:r>
-            <a:br/>
-            <a:r>
-              <a:rPr>
-                <a:solidFill>
-                  <a:srgbClr val="003B4F"/>
-                </a:solidFill>
-                <a:latin typeface="Courier"/>
-              </a:rPr>
-              <a:t>tree_df </a:t>
-            </a:r>
-            <a:r>
-              <a:rPr>
-                <a:solidFill>
-                  <a:srgbClr val="5E5E5E"/>
-                </a:solidFill>
-                <a:latin typeface="Courier"/>
-              </a:rPr>
-              <a:t>%&gt;%</a:t>
-            </a:r>
-            <a:br/>
-            <a:r>
-              <a:rPr>
-                <a:solidFill>
-                  <a:srgbClr val="003B4F"/>
-                </a:solidFill>
-                <a:latin typeface="Courier"/>
-              </a:rPr>
-              <a:t>  </a:t>
-            </a:r>
-            <a:r>
-              <a:rPr>
-                <a:solidFill>
-                  <a:srgbClr val="4758AB"/>
-                </a:solidFill>
-                <a:latin typeface="Courier"/>
-              </a:rPr>
-              <a:t>group_by</a:t>
-            </a:r>
-            <a:r>
-              <a:rPr>
-                <a:solidFill>
-                  <a:srgbClr val="003B4F"/>
-                </a:solidFill>
-                <a:latin typeface="Courier"/>
-              </a:rPr>
-              <a:t>(side) </a:t>
-            </a:r>
-            <a:r>
-              <a:rPr>
-                <a:solidFill>
-                  <a:srgbClr val="5E5E5E"/>
-                </a:solidFill>
-                <a:latin typeface="Courier"/>
-              </a:rPr>
-              <a:t>%&gt;%</a:t>
-            </a:r>
-            <a:br/>
-            <a:r>
-              <a:rPr>
-                <a:solidFill>
-                  <a:srgbClr val="003B4F"/>
-                </a:solidFill>
-                <a:latin typeface="Courier"/>
-              </a:rPr>
-              <a:t>  </a:t>
-            </a:r>
-            <a:r>
-              <a:rPr>
-                <a:solidFill>
-                  <a:srgbClr val="4758AB"/>
-                </a:solidFill>
-                <a:latin typeface="Courier"/>
-              </a:rPr>
-              <a:t>summarize</a:t>
-            </a:r>
-            <a:r>
-              <a:rPr>
-                <a:solidFill>
-                  <a:srgbClr val="003B4F"/>
-                </a:solidFill>
-                <a:latin typeface="Courier"/>
-              </a:rPr>
-              <a:t>(</a:t>
-            </a:r>
-            <a:r>
-              <a:rPr>
-                <a:solidFill>
-                  <a:srgbClr val="657422"/>
-                </a:solidFill>
-                <a:latin typeface="Courier"/>
-              </a:rPr>
-              <a:t>mean_weight =</a:t>
-            </a:r>
-            <a:r>
-              <a:rPr>
-                <a:solidFill>
-                  <a:srgbClr val="003B4F"/>
-                </a:solidFill>
-                <a:latin typeface="Courier"/>
-              </a:rPr>
-              <a:t> </a:t>
-            </a:r>
-            <a:r>
-              <a:rPr>
-                <a:solidFill>
-                  <a:srgbClr val="4758AB"/>
-                </a:solidFill>
-                <a:latin typeface="Courier"/>
-              </a:rPr>
-              <a:t>mean</a:t>
-            </a:r>
-            <a:r>
-              <a:rPr>
-                <a:solidFill>
-                  <a:srgbClr val="003B4F"/>
-                </a:solidFill>
-                <a:latin typeface="Courier"/>
-              </a:rPr>
-              <a:t>(weight_g))</a:t>
-            </a:r>
-            <a:br/>
-            <a:br/>
-            <a:r>
-              <a:rPr>
-                <a:solidFill>
-                  <a:srgbClr val="5E5E5E"/>
-                </a:solidFill>
-                <a:latin typeface="Courier"/>
-              </a:rPr>
-              <a:t># Make a plot</a:t>
-            </a:r>
-            <a:br/>
-            <a:r>
-              <a:rPr>
-                <a:solidFill>
-                  <a:srgbClr val="4758AB"/>
-                </a:solidFill>
-                <a:latin typeface="Courier"/>
-              </a:rPr>
-              <a:t>ggplot</a:t>
-            </a:r>
-            <a:r>
-              <a:rPr>
-                <a:solidFill>
-                  <a:srgbClr val="003B4F"/>
-                </a:solidFill>
-                <a:latin typeface="Courier"/>
-              </a:rPr>
-              <a:t>(tree_df, </a:t>
-            </a:r>
-            <a:r>
-              <a:rPr>
-                <a:solidFill>
-                  <a:srgbClr val="4758AB"/>
-                </a:solidFill>
-                <a:latin typeface="Courier"/>
-              </a:rPr>
-              <a:t>aes</a:t>
-            </a:r>
-            <a:r>
-              <a:rPr>
-                <a:solidFill>
-                  <a:srgbClr val="003B4F"/>
-                </a:solidFill>
-                <a:latin typeface="Courier"/>
-              </a:rPr>
-              <a:t>(</a:t>
-            </a:r>
-            <a:r>
-              <a:rPr>
-                <a:solidFill>
-                  <a:srgbClr val="657422"/>
-                </a:solidFill>
-                <a:latin typeface="Courier"/>
-              </a:rPr>
-              <a:t>x =</a:t>
-            </a:r>
-            <a:r>
-              <a:rPr>
-                <a:solidFill>
-                  <a:srgbClr val="003B4F"/>
-                </a:solidFill>
-                <a:latin typeface="Courier"/>
-              </a:rPr>
-              <a:t> side, </a:t>
-            </a:r>
-            <a:r>
-              <a:rPr>
-                <a:solidFill>
-                  <a:srgbClr val="657422"/>
-                </a:solidFill>
-                <a:latin typeface="Courier"/>
-              </a:rPr>
-              <a:t>y =</a:t>
-            </a:r>
-            <a:r>
-              <a:rPr>
-                <a:solidFill>
-                  <a:srgbClr val="003B4F"/>
-                </a:solidFill>
-                <a:latin typeface="Courier"/>
-              </a:rPr>
-              <a:t> weight_g)) </a:t>
-            </a:r>
-            <a:r>
-              <a:rPr>
-                <a:solidFill>
-                  <a:srgbClr val="5E5E5E"/>
-                </a:solidFill>
-                <a:latin typeface="Courier"/>
-              </a:rPr>
-              <a:t>+</a:t>
-            </a:r>
-            <a:br/>
-            <a:r>
-              <a:rPr>
-                <a:solidFill>
-                  <a:srgbClr val="003B4F"/>
-                </a:solidFill>
-                <a:latin typeface="Courier"/>
-              </a:rPr>
-              <a:t>  </a:t>
-            </a:r>
-            <a:r>
-              <a:rPr>
-                <a:solidFill>
-                  <a:srgbClr val="4758AB"/>
-                </a:solidFill>
-                <a:latin typeface="Courier"/>
-              </a:rPr>
-              <a:t>geom_boxplot</a:t>
-            </a:r>
-            <a:r>
-              <a:rPr>
-                <a:solidFill>
-                  <a:srgbClr val="003B4F"/>
-                </a:solidFill>
-                <a:latin typeface="Courier"/>
-              </a:rPr>
-              <a:t>()</a:t>
+            <a:pPr lvl="0"/>
+            <a:r>
+              <a:rPr/>
+              <a:t>Using what you collected, make a simple Excel chart</a:t>
+            </a:r>
+          </a:p>
+          <a:p>
+            <a:pPr lvl="1"/>
+            <a:r>
+              <a:rPr/>
+              <a:t>What would the graph look like?</a:t>
+            </a:r>
+          </a:p>
+          <a:p>
+            <a:pPr lvl="1"/>
+            <a:r>
+              <a:rPr/>
+              <a:t>What goes on the X axis? The Y axis?</a:t>
+            </a:r>
+          </a:p>
+          <a:p>
+            <a:pPr lvl="1"/>
+            <a:r>
+              <a:rPr/>
+              <a:t>What can you derive from the data already?</a:t>
             </a:r>
           </a:p>
           <a:p>
@@ -4864,7 +4568,7 @@
             </a:pPr>
             <a:r>
               <a:rPr sz="2000" b="1"/>
-              <a:t>Tip</a:t>
+              <a:t>Note</a:t>
             </a:r>
           </a:p>
           <a:p>
@@ -4872,25 +4576,8 @@
               <a:buNone/>
             </a:pPr>
             <a:r>
-              <a:rPr sz="2000" b="1"/>
-              <a:t>🖐 Notice</a:t>
-            </a:r>
-          </a:p>
-          <a:p>
-            <a:pPr lvl="0" indent="0" marL="1270000">
-              <a:buNone/>
-            </a:pPr>
-            <a:r>
               <a:rPr sz="2000"/>
-              <a:t>It reads almost like English: </a:t>
-            </a:r>
-            <a:r>
-              <a:rPr sz="2000" i="1"/>
-              <a:t>take tree_df, then group by side, then compute the mean</a:t>
-            </a:r>
-            <a:r>
-              <a:rPr sz="2000"/>
-              <a:t>. That is the goal — code that tells a clear story.</a:t>
+              <a:t>Excel is great for a first look. But as datasets grow larger and analyses more complex, we need another approach - R.</a:t>
             </a:r>
           </a:p>
         </p:txBody>
@@ -4942,6 +4629,479 @@
             </a:pPr>
             <a:r>
               <a:rPr/>
+              <a:t>What R code looks like · A preview</a:t>
+            </a:r>
+          </a:p>
+        </p:txBody>
+      </p:sp>
+      <p:sp>
+        <p:nvSpPr>
+          <p:cNvPr id="3" name="Content Placeholder 2"/>
+          <p:cNvSpPr>
+            <a:spLocks noGrp="1"/>
+          </p:cNvSpPr>
+          <p:nvPr>
+            <p:ph idx="1"/>
+          </p:nvPr>
+        </p:nvSpPr>
+        <p:spPr/>
+        <p:txBody>
+          <a:bodyPr/>
+          <a:lstStyle/>
+          <a:p>
+            <a:pPr lvl="0" indent="0" marL="0">
+              <a:buNone/>
+            </a:pPr>
+            <a:r>
+              <a:rPr/>
+              <a:t>You do not need to understand this yet — just look at the shape of it.</a:t>
+            </a:r>
+          </a:p>
+          <a:p>
+            <a:pPr lvl="0" indent="0">
+              <a:buNone/>
+            </a:pPr>
+            <a:r>
+              <a:rPr>
+                <a:solidFill>
+                  <a:srgbClr val="5E5E5E"/>
+                </a:solidFill>
+                <a:latin typeface="Courier"/>
+              </a:rPr>
+              <a:t># Load the tools we need</a:t>
+            </a:r>
+            <a:br/>
+            <a:r>
+              <a:rPr>
+                <a:solidFill>
+                  <a:srgbClr val="4758AB"/>
+                </a:solidFill>
+                <a:latin typeface="Courier"/>
+              </a:rPr>
+              <a:t>library</a:t>
+            </a:r>
+            <a:r>
+              <a:rPr>
+                <a:solidFill>
+                  <a:srgbClr val="003B4F"/>
+                </a:solidFill>
+                <a:latin typeface="Courier"/>
+              </a:rPr>
+              <a:t>(tidyverse)</a:t>
+            </a:r>
+            <a:br/>
+            <a:r>
+              <a:rPr>
+                <a:solidFill>
+                  <a:srgbClr val="4758AB"/>
+                </a:solidFill>
+                <a:latin typeface="Courier"/>
+              </a:rPr>
+              <a:t>library</a:t>
+            </a:r>
+            <a:r>
+              <a:rPr>
+                <a:solidFill>
+                  <a:srgbClr val="003B4F"/>
+                </a:solidFill>
+                <a:latin typeface="Courier"/>
+              </a:rPr>
+              <a:t>(readxl)</a:t>
+            </a:r>
+            <a:br/>
+            <a:br/>
+            <a:r>
+              <a:rPr>
+                <a:solidFill>
+                  <a:srgbClr val="5E5E5E"/>
+                </a:solidFill>
+                <a:latin typeface="Courier"/>
+              </a:rPr>
+              <a:t># Read our leaf data into R</a:t>
+            </a:r>
+            <a:br/>
+            <a:r>
+              <a:rPr>
+                <a:solidFill>
+                  <a:srgbClr val="003B4F"/>
+                </a:solidFill>
+                <a:latin typeface="Courier"/>
+              </a:rPr>
+              <a:t>tree_df &lt;- </a:t>
+            </a:r>
+            <a:r>
+              <a:rPr>
+                <a:solidFill>
+                  <a:srgbClr val="4758AB"/>
+                </a:solidFill>
+                <a:latin typeface="Courier"/>
+              </a:rPr>
+              <a:t>read_excel</a:t>
+            </a:r>
+            <a:r>
+              <a:rPr>
+                <a:solidFill>
+                  <a:srgbClr val="003B4F"/>
+                </a:solidFill>
+                <a:latin typeface="Courier"/>
+              </a:rPr>
+              <a:t>(</a:t>
+            </a:r>
+            <a:r>
+              <a:rPr>
+                <a:solidFill>
+                  <a:srgbClr val="20794D"/>
+                </a:solidFill>
+                <a:latin typeface="Courier"/>
+              </a:rPr>
+              <a:t>"data/tree_experiment.xlsx"</a:t>
+            </a:r>
+            <a:r>
+              <a:rPr>
+                <a:solidFill>
+                  <a:srgbClr val="003B4F"/>
+                </a:solidFill>
+                <a:latin typeface="Courier"/>
+              </a:rPr>
+              <a:t>)</a:t>
+            </a:r>
+            <a:br/>
+            <a:br/>
+            <a:r>
+              <a:rPr>
+                <a:solidFill>
+                  <a:srgbClr val="5E5E5E"/>
+                </a:solidFill>
+                <a:latin typeface="Courier"/>
+              </a:rPr>
+              <a:t># Compute the mean weight for each side</a:t>
+            </a:r>
+            <a:br/>
+            <a:r>
+              <a:rPr>
+                <a:solidFill>
+                  <a:srgbClr val="003B4F"/>
+                </a:solidFill>
+                <a:latin typeface="Courier"/>
+              </a:rPr>
+              <a:t>tree_df </a:t>
+            </a:r>
+            <a:r>
+              <a:rPr>
+                <a:solidFill>
+                  <a:srgbClr val="5E5E5E"/>
+                </a:solidFill>
+                <a:latin typeface="Courier"/>
+              </a:rPr>
+              <a:t>%&gt;%</a:t>
+            </a:r>
+            <a:br/>
+            <a:r>
+              <a:rPr>
+                <a:solidFill>
+                  <a:srgbClr val="003B4F"/>
+                </a:solidFill>
+                <a:latin typeface="Courier"/>
+              </a:rPr>
+              <a:t>  </a:t>
+            </a:r>
+            <a:r>
+              <a:rPr>
+                <a:solidFill>
+                  <a:srgbClr val="4758AB"/>
+                </a:solidFill>
+                <a:latin typeface="Courier"/>
+              </a:rPr>
+              <a:t>group_by</a:t>
+            </a:r>
+            <a:r>
+              <a:rPr>
+                <a:solidFill>
+                  <a:srgbClr val="003B4F"/>
+                </a:solidFill>
+                <a:latin typeface="Courier"/>
+              </a:rPr>
+              <a:t>(side) </a:t>
+            </a:r>
+            <a:r>
+              <a:rPr>
+                <a:solidFill>
+                  <a:srgbClr val="5E5E5E"/>
+                </a:solidFill>
+                <a:latin typeface="Courier"/>
+              </a:rPr>
+              <a:t>%&gt;%</a:t>
+            </a:r>
+            <a:br/>
+            <a:r>
+              <a:rPr>
+                <a:solidFill>
+                  <a:srgbClr val="003B4F"/>
+                </a:solidFill>
+                <a:latin typeface="Courier"/>
+              </a:rPr>
+              <a:t>  </a:t>
+            </a:r>
+            <a:r>
+              <a:rPr>
+                <a:solidFill>
+                  <a:srgbClr val="4758AB"/>
+                </a:solidFill>
+                <a:latin typeface="Courier"/>
+              </a:rPr>
+              <a:t>summarize</a:t>
+            </a:r>
+            <a:r>
+              <a:rPr>
+                <a:solidFill>
+                  <a:srgbClr val="003B4F"/>
+                </a:solidFill>
+                <a:latin typeface="Courier"/>
+              </a:rPr>
+              <a:t>(</a:t>
+            </a:r>
+            <a:r>
+              <a:rPr>
+                <a:solidFill>
+                  <a:srgbClr val="657422"/>
+                </a:solidFill>
+                <a:latin typeface="Courier"/>
+              </a:rPr>
+              <a:t>mean_weight =</a:t>
+            </a:r>
+            <a:r>
+              <a:rPr>
+                <a:solidFill>
+                  <a:srgbClr val="003B4F"/>
+                </a:solidFill>
+                <a:latin typeface="Courier"/>
+              </a:rPr>
+              <a:t> </a:t>
+            </a:r>
+            <a:r>
+              <a:rPr>
+                <a:solidFill>
+                  <a:srgbClr val="4758AB"/>
+                </a:solidFill>
+                <a:latin typeface="Courier"/>
+              </a:rPr>
+              <a:t>mean</a:t>
+            </a:r>
+            <a:r>
+              <a:rPr>
+                <a:solidFill>
+                  <a:srgbClr val="003B4F"/>
+                </a:solidFill>
+                <a:latin typeface="Courier"/>
+              </a:rPr>
+              <a:t>(weight_g))</a:t>
+            </a:r>
+            <a:br/>
+            <a:br/>
+            <a:r>
+              <a:rPr>
+                <a:solidFill>
+                  <a:srgbClr val="5E5E5E"/>
+                </a:solidFill>
+                <a:latin typeface="Courier"/>
+              </a:rPr>
+              <a:t># Make a plot</a:t>
+            </a:r>
+            <a:br/>
+            <a:r>
+              <a:rPr>
+                <a:solidFill>
+                  <a:srgbClr val="4758AB"/>
+                </a:solidFill>
+                <a:latin typeface="Courier"/>
+              </a:rPr>
+              <a:t>ggplot</a:t>
+            </a:r>
+            <a:r>
+              <a:rPr>
+                <a:solidFill>
+                  <a:srgbClr val="003B4F"/>
+                </a:solidFill>
+                <a:latin typeface="Courier"/>
+              </a:rPr>
+              <a:t>(tree_df, </a:t>
+            </a:r>
+            <a:r>
+              <a:rPr>
+                <a:solidFill>
+                  <a:srgbClr val="4758AB"/>
+                </a:solidFill>
+                <a:latin typeface="Courier"/>
+              </a:rPr>
+              <a:t>aes</a:t>
+            </a:r>
+            <a:r>
+              <a:rPr>
+                <a:solidFill>
+                  <a:srgbClr val="003B4F"/>
+                </a:solidFill>
+                <a:latin typeface="Courier"/>
+              </a:rPr>
+              <a:t>(</a:t>
+            </a:r>
+            <a:r>
+              <a:rPr>
+                <a:solidFill>
+                  <a:srgbClr val="657422"/>
+                </a:solidFill>
+                <a:latin typeface="Courier"/>
+              </a:rPr>
+              <a:t>x =</a:t>
+            </a:r>
+            <a:r>
+              <a:rPr>
+                <a:solidFill>
+                  <a:srgbClr val="003B4F"/>
+                </a:solidFill>
+                <a:latin typeface="Courier"/>
+              </a:rPr>
+              <a:t> side, </a:t>
+            </a:r>
+            <a:r>
+              <a:rPr>
+                <a:solidFill>
+                  <a:srgbClr val="657422"/>
+                </a:solidFill>
+                <a:latin typeface="Courier"/>
+              </a:rPr>
+              <a:t>y =</a:t>
+            </a:r>
+            <a:r>
+              <a:rPr>
+                <a:solidFill>
+                  <a:srgbClr val="003B4F"/>
+                </a:solidFill>
+                <a:latin typeface="Courier"/>
+              </a:rPr>
+              <a:t> weight_g)) </a:t>
+            </a:r>
+            <a:r>
+              <a:rPr>
+                <a:solidFill>
+                  <a:srgbClr val="5E5E5E"/>
+                </a:solidFill>
+                <a:latin typeface="Courier"/>
+              </a:rPr>
+              <a:t>+</a:t>
+            </a:r>
+            <a:br/>
+            <a:r>
+              <a:rPr>
+                <a:solidFill>
+                  <a:srgbClr val="003B4F"/>
+                </a:solidFill>
+                <a:latin typeface="Courier"/>
+              </a:rPr>
+              <a:t>  </a:t>
+            </a:r>
+            <a:r>
+              <a:rPr>
+                <a:solidFill>
+                  <a:srgbClr val="4758AB"/>
+                </a:solidFill>
+                <a:latin typeface="Courier"/>
+              </a:rPr>
+              <a:t>geom_boxplot</a:t>
+            </a:r>
+            <a:r>
+              <a:rPr>
+                <a:solidFill>
+                  <a:srgbClr val="003B4F"/>
+                </a:solidFill>
+                <a:latin typeface="Courier"/>
+              </a:rPr>
+              <a:t>()</a:t>
+            </a:r>
+          </a:p>
+          <a:p>
+            <a:pPr lvl="0" indent="0" marL="1270000">
+              <a:buNone/>
+            </a:pPr>
+            <a:r>
+              <a:rPr sz="2000" b="1"/>
+              <a:t>Tip</a:t>
+            </a:r>
+          </a:p>
+          <a:p>
+            <a:pPr lvl="0" indent="0" marL="1270000">
+              <a:buNone/>
+            </a:pPr>
+            <a:r>
+              <a:rPr sz="2000" b="1"/>
+              <a:t>🖐 Notice</a:t>
+            </a:r>
+          </a:p>
+          <a:p>
+            <a:pPr lvl="0" indent="0" marL="1270000">
+              <a:buNone/>
+            </a:pPr>
+            <a:r>
+              <a:rPr sz="2000"/>
+              <a:t>It reads almost like English: </a:t>
+            </a:r>
+            <a:r>
+              <a:rPr sz="2000" i="1"/>
+              <a:t>take tree_df, then group by side, then compute the mean</a:t>
+            </a:r>
+            <a:r>
+              <a:rPr sz="2000"/>
+              <a:t>. That is the goal — code that tells a clear story.</a:t>
+            </a:r>
+          </a:p>
+        </p:txBody>
+      </p:sp>
+    </p:spTree>
+  </p:cSld>
+</p:sld>
+</file>
+
+<file path=ppt/slides/slide18.xml><?xml version="1.0" encoding="utf-8"?>
+<p:sld xmlns:a="http://schemas.openxmlformats.org/drawingml/2006/main" xmlns:r="http://schemas.openxmlformats.org/officeDocument/2006/relationships" xmlns:p="http://schemas.openxmlformats.org/presentationml/2006/main">
+  <p:cSld>
+    <p:spTree>
+      <p:nvGrpSpPr>
+        <p:cNvPr id="1" name=""/>
+        <p:cNvGrpSpPr/>
+        <p:nvPr/>
+      </p:nvGrpSpPr>
+      <p:grpSpPr>
+        <a:xfrm>
+          <a:off x="0" y="0"/>
+          <a:ext cx="0" cy="0"/>
+          <a:chOff x="0" y="0"/>
+          <a:chExt cx="0" cy="0"/>
+        </a:xfrm>
+      </p:grpSpPr>
+      <p:sp>
+        <p:nvSpPr>
+          <p:cNvPr id="2" name="Title 1"/>
+          <p:cNvSpPr>
+            <a:spLocks noGrp="1"/>
+          </p:cNvSpPr>
+          <p:nvPr>
+            <p:ph type="title"/>
+          </p:nvPr>
+        </p:nvSpPr>
+        <p:spPr>
+          <a:xfrm>
+            <a:off x="0" y="0"/>
+            <a:ext cx="9144000" cy="582780"/>
+          </a:xfrm>
+        </p:spPr>
+        <p:txBody>
+          <a:bodyPr/>
+          <a:lstStyle/>
+          <a:p>
+            <a:pPr lvl="0" indent="0" marL="0">
+              <a:buNone/>
+            </a:pPr>
+            <a:r>
+              <a:rPr/>
               <a:t>Before Thursday · Install R and Positron</a:t>
             </a:r>
           </a:p>
@@ -5063,6 +5223,150 @@
             <a:r>
               <a:rPr sz="2000"/>
               <a:t>Install R first, then Positron. If you install Positron first, it may not find R automatically.</a:t>
+            </a:r>
+          </a:p>
+        </p:txBody>
+      </p:sp>
+    </p:spTree>
+  </p:cSld>
+</p:sld>
+</file>
+
+<file path=ppt/slides/slide19.xml><?xml version="1.0" encoding="utf-8"?>
+<p:sld xmlns:a="http://schemas.openxmlformats.org/drawingml/2006/main" xmlns:r="http://schemas.openxmlformats.org/officeDocument/2006/relationships" xmlns:p="http://schemas.openxmlformats.org/presentationml/2006/main">
+  <p:cSld>
+    <p:spTree>
+      <p:nvGrpSpPr>
+        <p:cNvPr id="1" name=""/>
+        <p:cNvGrpSpPr/>
+        <p:nvPr/>
+      </p:nvGrpSpPr>
+      <p:grpSpPr>
+        <a:xfrm>
+          <a:off x="0" y="0"/>
+          <a:ext cx="0" cy="0"/>
+          <a:chOff x="0" y="0"/>
+          <a:chExt cx="0" cy="0"/>
+        </a:xfrm>
+      </p:grpSpPr>
+      <p:sp>
+        <p:nvSpPr>
+          <p:cNvPr id="2" name="Title 1"/>
+          <p:cNvSpPr>
+            <a:spLocks noGrp="1"/>
+          </p:cNvSpPr>
+          <p:nvPr>
+            <p:ph type="title"/>
+          </p:nvPr>
+        </p:nvSpPr>
+        <p:spPr>
+          <a:xfrm>
+            <a:off x="0" y="0"/>
+            <a:ext cx="9144000" cy="582780"/>
+          </a:xfrm>
+        </p:spPr>
+        <p:txBody>
+          <a:bodyPr/>
+          <a:lstStyle/>
+          <a:p>
+            <a:pPr lvl="0" indent="0" marL="0">
+              <a:buNone/>
+            </a:pPr>
+            <a:r>
+              <a:rPr/>
+              <a:t>Suggested reading before Lecture 2</a:t>
+            </a:r>
+          </a:p>
+        </p:txBody>
+      </p:sp>
+      <p:sp>
+        <p:nvSpPr>
+          <p:cNvPr id="3" name="Content Placeholder 2"/>
+          <p:cNvSpPr>
+            <a:spLocks noGrp="1"/>
+          </p:cNvSpPr>
+          <p:nvPr>
+            <p:ph idx="1"/>
+          </p:nvPr>
+        </p:nvSpPr>
+        <p:spPr/>
+        <p:txBody>
+          <a:bodyPr/>
+          <a:lstStyle/>
+          <a:p>
+            <a:pPr lvl="0"/>
+            <a:r>
+              <a:rPr b="1"/>
+              <a:t>Whitlock &amp; Schluter</a:t>
+            </a:r>
+            <a:r>
+              <a:rPr/>
+              <a:t>, Ch. 1 — </a:t>
+            </a:r>
+            <a:r>
+              <a:rPr i="1"/>
+              <a:t>Statistics and Samples</a:t>
+            </a:r>
+          </a:p>
+          <a:p>
+            <a:pPr lvl="1"/>
+            <a:r>
+              <a:rPr/>
+              <a:t>Read the whole chapter — it is short and covers everything we discussed today: forming a question, samples vs. populations, and why we replicate and randomize</a:t>
+            </a:r>
+          </a:p>
+          <a:p>
+            <a:pPr lvl="0"/>
+            <a:r>
+              <a:rPr b="1"/>
+              <a:t>R for Data Science (2e)</a:t>
+            </a:r>
+            <a:r>
+              <a:rPr/>
+              <a:t>, Ch. 1 — </a:t>
+            </a:r>
+            <a:r>
+              <a:rPr i="1"/>
+              <a:t>Data Visualization</a:t>
+            </a:r>
+            <a:r>
+              <a:rPr/>
+              <a:t> (skim only)</a:t>
+            </a:r>
+          </a:p>
+          <a:p>
+            <a:pPr lvl="1"/>
+            <a:r>
+              <a:rPr/>
+              <a:t>You do not need to run any code yet. Just look at the pictures and read the first few pages — it previews what we build in Lecture 2</a:t>
+            </a:r>
+          </a:p>
+          <a:p>
+            <a:pPr lvl="0" indent="0" marL="1270000">
+              <a:buNone/>
+            </a:pPr>
+            <a:r>
+              <a:rPr sz="2000" b="1"/>
+              <a:t>Note</a:t>
+            </a:r>
+          </a:p>
+          <a:p>
+            <a:pPr lvl="0" indent="0" marL="1270000">
+              <a:buNone/>
+            </a:pPr>
+            <a:r>
+              <a:rPr sz="2000"/>
+              <a:t>Both PDFs are in the course </a:t>
+            </a:r>
+            <a:r>
+              <a:rPr sz="2000">
+                <a:latin typeface="Courier"/>
+              </a:rPr>
+              <a:t>readings/</a:t>
+            </a:r>
+            <a:r>
+              <a:rPr sz="2000"/>
+              <a:t> folder. Neither reading requires you to write anything — just read and come with questions.</a:t>
             </a:r>
           </a:p>
           <a:p>
@@ -5355,7 +5659,7 @@
         </p:blipFill>
         <p:spPr bwMode="auto">
           <a:xfrm>
-            <a:off x="4495800" y="927100"/>
+            <a:off x="4495800" y="673100"/>
             <a:ext cx="4406900" cy="3276600"/>
           </a:xfrm>
           <a:prstGeom prst="rect">
@@ -5369,6 +5673,38 @@
           </a:ln>
         </p:spPr>
       </p:pic>
+      <p:sp>
+        <p:nvSpPr>
+          <p:cNvPr id="1" name="TextBox 3"/>
+          <p:cNvSpPr txBox="1"/>
+          <p:nvPr>
+            <p:ph idx="1"/>
+          </p:nvPr>
+        </p:nvSpPr>
+        <p:spPr>
+          <a:xfrm>
+            <a:off x="4495800" y="3962400"/>
+            <a:ext cx="4406900" cy="508000"/>
+          </a:xfrm>
+          <a:prstGeom prst="rect">
+            <a:avLst/>
+          </a:prstGeom>
+          <a:noFill/>
+        </p:spPr>
+        <p:txBody>
+          <a:bodyPr/>
+          <a:lstStyle/>
+          <a:p>
+            <a:pPr lvl="0" indent="0" marL="0" algn="ctr">
+              <a:buNone/>
+            </a:pPr>
+            <a:r>
+              <a:rPr/>
+              <a:t>Exterior photo of the Swenson Science Building, with the instructor’s office entrance and lab location highlighted in red.</a:t>
+            </a:r>
+          </a:p>
+        </p:txBody>
+      </p:sp>
     </p:spTree>
   </p:cSld>
 </p:sld>
@@ -5555,7 +5891,16 @@
             </a:r>
             <a:r>
               <a:rPr sz="2000"/>
-              <a:t> raw data → clean → summarize → visualize → test → report This course teaches every step.</a:t>
+              <a:t> raw data → clean → summarize → visualize → test → report.</a:t>
+            </a:r>
+          </a:p>
+          <a:p>
+            <a:pPr lvl="0" indent="0" marL="1270000">
+              <a:buNone/>
+            </a:pPr>
+            <a:r>
+              <a:rPr sz="2000"/>
+              <a:t>This course teaches every step.</a:t>
             </a:r>
           </a:p>
         </p:txBody>
@@ -5981,6 +6326,41 @@
             <a:r>
               <a:rPr sz="2000"/>
               <a:t>A good hypothesis is one you could prove false.</a:t>
+            </a:r>
+          </a:p>
+          <a:p>
+            <a:pPr lvl="0" indent="0" marL="1270000">
+              <a:buNone/>
+            </a:pPr>
+            <a:r>
+              <a:rPr sz="2000" b="1"/>
+              <a:t>Note</a:t>
+            </a:r>
+          </a:p>
+          <a:p>
+            <a:pPr lvl="0" indent="0" marL="1270000">
+              <a:buNone/>
+            </a:pPr>
+            <a:r>
+              <a:rPr sz="2000" b="1"/>
+              <a:t>📚 Suggested reading (outside of class)</a:t>
+            </a:r>
+          </a:p>
+          <a:p>
+            <a:pPr lvl="0" indent="0" marL="1270000">
+              <a:buNone/>
+            </a:pPr>
+            <a:r>
+              <a:rPr sz="2000"/>
+              <a:t>Whitlock &amp; Schluter, Ch. 1 — </a:t>
+            </a:r>
+            <a:r>
+              <a:rPr sz="2000" i="1"/>
+              <a:t>Statistics and Samples</a:t>
+            </a:r>
+            <a:r>
+              <a:rPr sz="2000"/>
+              <a:t>. Covers how biologists turn a question about nature into something we can measure and test — the same path we take today with leaves.</a:t>
             </a:r>
           </a:p>
         </p:txBody>

--- a/docs/content/introduction/introduction_lecture.pptx
+++ b/docs/content/introduction/introduction_lecture.pptx
@@ -3358,7 +3358,7 @@
             </a:pPr>
             <a:r>
               <a:rPr/>
-              <a:t>2026-08-27</a:t>
+              <a:t>2026-09-01</a:t>
             </a:r>
           </a:p>
         </p:txBody>

--- a/docs/content/introduction/introduction_lecture.pptx
+++ b/docs/content/introduction/introduction_lecture.pptx
@@ -3358,7 +3358,7 @@
             </a:pPr>
             <a:r>
               <a:rPr/>
-              <a:t>2026-09-01</a:t>
+              <a:t>2026-09-03</a:t>
             </a:r>
           </a:p>
         </p:txBody>

--- a/docs/content/introduction/introduction_lecture.pptx
+++ b/docs/content/introduction/introduction_lecture.pptx
@@ -3358,7 +3358,7 @@
             </a:pPr>
             <a:r>
               <a:rPr/>
-              <a:t>2026-09-03</a:t>
+              <a:t>2026-09-04</a:t>
             </a:r>
           </a:p>
         </p:txBody>
